--- a/proposal/올더베러_플라이휠_3p.pptx
+++ b/proposal/올더베러_플라이휠_3p.pptx
@@ -3592,8 +3592,8 @@
         </p:nvSpPr>
         <p:spPr>
           <a:xfrm>
-            <a:off x="5093207" y="2395728"/>
-            <a:ext cx="3255264" cy="3255264"/>
+            <a:off x="4599432" y="2542032"/>
+            <a:ext cx="2962656" cy="2962656"/>
           </a:xfrm>
           <a:prstGeom prst="ellipse">
             <a:avLst/>
@@ -3636,7 +3636,7 @@
         </p:nvSpPr>
         <p:spPr>
           <a:xfrm rot="13500000">
-            <a:off x="7725445" y="5018821"/>
+            <a:off x="6981913" y="4915369"/>
             <a:ext cx="292608" cy="310896"/>
           </a:xfrm>
           <a:prstGeom prst="triangle">
@@ -3680,7 +3680,7 @@
         </p:nvSpPr>
         <p:spPr>
           <a:xfrm rot="18900000">
-            <a:off x="5423626" y="5018821"/>
+            <a:off x="4886998" y="4915369"/>
             <a:ext cx="292608" cy="310896"/>
           </a:xfrm>
           <a:prstGeom prst="triangle">
@@ -3724,7 +3724,7 @@
         </p:nvSpPr>
         <p:spPr>
           <a:xfrm rot="2700000">
-            <a:off x="5423626" y="2717002"/>
+            <a:off x="4886998" y="2820454"/>
             <a:ext cx="292608" cy="310896"/>
           </a:xfrm>
           <a:prstGeom prst="triangle">
@@ -3768,7 +3768,7 @@
         </p:nvSpPr>
         <p:spPr>
           <a:xfrm rot="8100000">
-            <a:off x="7725445" y="2717002"/>
+            <a:off x="6981913" y="2820454"/>
             <a:ext cx="292608" cy="310896"/>
           </a:xfrm>
           <a:prstGeom prst="triangle">
@@ -3812,7 +3812,7 @@
         </p:nvSpPr>
         <p:spPr>
           <a:xfrm>
-            <a:off x="6007607" y="3310128"/>
+            <a:off x="5367528" y="3310128"/>
             <a:ext cx="1426464" cy="1426464"/>
           </a:xfrm>
           <a:prstGeom prst="ellipse">
@@ -3856,7 +3856,7 @@
         </p:nvSpPr>
         <p:spPr>
           <a:xfrm>
-            <a:off x="6007607" y="3639312"/>
+            <a:off x="5367528" y="3639312"/>
             <a:ext cx="1426464" cy="365760"/>
           </a:xfrm>
           <a:prstGeom prst="rect">
@@ -3895,7 +3895,7 @@
         </p:nvSpPr>
         <p:spPr>
           <a:xfrm>
-            <a:off x="6007607" y="4059936"/>
+            <a:off x="5367528" y="4059936"/>
             <a:ext cx="1426464" cy="274320"/>
           </a:xfrm>
           <a:prstGeom prst="rect">
@@ -3934,7 +3934,7 @@
         </p:nvSpPr>
         <p:spPr>
           <a:xfrm>
-            <a:off x="5806440" y="1975104"/>
+            <a:off x="5166360" y="2121408"/>
             <a:ext cx="1828800" cy="841248"/>
           </a:xfrm>
           <a:prstGeom prst="roundRect">
@@ -3982,7 +3982,7 @@
         </p:nvSpPr>
         <p:spPr>
           <a:xfrm>
-            <a:off x="5806440" y="2103120"/>
+            <a:off x="5166360" y="2249424"/>
             <a:ext cx="1828800" cy="310896"/>
           </a:xfrm>
           <a:prstGeom prst="rect">
@@ -4021,7 +4021,7 @@
         </p:nvSpPr>
         <p:spPr>
           <a:xfrm>
-            <a:off x="5806440" y="2414016"/>
+            <a:off x="5166360" y="2560320"/>
             <a:ext cx="1828800" cy="274320"/>
           </a:xfrm>
           <a:prstGeom prst="rect">
@@ -4060,7 +4060,7 @@
         </p:nvSpPr>
         <p:spPr>
           <a:xfrm>
-            <a:off x="7434071" y="3602736"/>
+            <a:off x="6647688" y="3602736"/>
             <a:ext cx="1828800" cy="841248"/>
           </a:xfrm>
           <a:prstGeom prst="roundRect">
@@ -4108,7 +4108,7 @@
         </p:nvSpPr>
         <p:spPr>
           <a:xfrm>
-            <a:off x="7434071" y="3730752"/>
+            <a:off x="6647688" y="3730752"/>
             <a:ext cx="1828800" cy="310896"/>
           </a:xfrm>
           <a:prstGeom prst="rect">
@@ -4147,7 +4147,7 @@
         </p:nvSpPr>
         <p:spPr>
           <a:xfrm>
-            <a:off x="7434071" y="4041648"/>
+            <a:off x="6647688" y="4041648"/>
             <a:ext cx="1828800" cy="274320"/>
           </a:xfrm>
           <a:prstGeom prst="rect">
@@ -4186,7 +4186,7 @@
         </p:nvSpPr>
         <p:spPr>
           <a:xfrm>
-            <a:off x="5806440" y="5230368"/>
+            <a:off x="5166360" y="5084064"/>
             <a:ext cx="1828800" cy="841248"/>
           </a:xfrm>
           <a:prstGeom prst="roundRect">
@@ -4234,7 +4234,7 @@
         </p:nvSpPr>
         <p:spPr>
           <a:xfrm>
-            <a:off x="5806440" y="5358384"/>
+            <a:off x="5166360" y="5212080"/>
             <a:ext cx="1828800" cy="310896"/>
           </a:xfrm>
           <a:prstGeom prst="rect">
@@ -4273,7 +4273,7 @@
         </p:nvSpPr>
         <p:spPr>
           <a:xfrm>
-            <a:off x="5806440" y="5669280"/>
+            <a:off x="5166360" y="5522976"/>
             <a:ext cx="1828800" cy="274320"/>
           </a:xfrm>
           <a:prstGeom prst="rect">
@@ -4312,7 +4312,7 @@
         </p:nvSpPr>
         <p:spPr>
           <a:xfrm>
-            <a:off x="4178807" y="3602736"/>
+            <a:off x="3685032" y="3602736"/>
             <a:ext cx="1828800" cy="841248"/>
           </a:xfrm>
           <a:prstGeom prst="roundRect">
@@ -4360,7 +4360,7 @@
         </p:nvSpPr>
         <p:spPr>
           <a:xfrm>
-            <a:off x="4178807" y="3730752"/>
+            <a:off x="3685032" y="3730752"/>
             <a:ext cx="1828800" cy="310896"/>
           </a:xfrm>
           <a:prstGeom prst="rect">
@@ -4399,7 +4399,7 @@
         </p:nvSpPr>
         <p:spPr>
           <a:xfrm>
-            <a:off x="4178807" y="4041648"/>
+            <a:off x="3685032" y="4041648"/>
             <a:ext cx="1828800" cy="274320"/>
           </a:xfrm>
           <a:prstGeom prst="rect">
@@ -4438,7 +4438,7 @@
         </p:nvSpPr>
         <p:spPr>
           <a:xfrm>
-            <a:off x="5349240" y="1792224"/>
+            <a:off x="4709160" y="1938528"/>
             <a:ext cx="2743200" cy="274320"/>
           </a:xfrm>
           <a:prstGeom prst="rect">
@@ -4477,8 +4477,8 @@
         </p:nvSpPr>
         <p:spPr>
           <a:xfrm>
-            <a:off x="9738360" y="1783080"/>
-            <a:ext cx="1993392" cy="4114800"/>
+            <a:off x="8887968" y="1783080"/>
+            <a:ext cx="2852928" cy="4114800"/>
           </a:xfrm>
           <a:prstGeom prst="roundRect">
             <a:avLst>
@@ -4525,8 +4525,8 @@
         </p:nvSpPr>
         <p:spPr>
           <a:xfrm>
-            <a:off x="9893808" y="1938528"/>
-            <a:ext cx="1737360" cy="274320"/>
+            <a:off x="9052560" y="1901952"/>
+            <a:ext cx="2542032" cy="274320"/>
           </a:xfrm>
           <a:prstGeom prst="rect">
             <a:avLst/>
@@ -4558,18 +4558,57 @@
       </p:sp>
       <p:sp>
         <p:nvSpPr>
-          <p:cNvPr id="33" name="Rounded Rectangle 32"/>
+          <p:cNvPr id="33" name="TextBox 32"/>
+          <p:cNvSpPr txBox="1"/>
+          <p:nvPr/>
+        </p:nvSpPr>
+        <p:spPr>
+          <a:xfrm>
+            <a:off x="9052560" y="2139696"/>
+            <a:ext cx="2542032" cy="274320"/>
+          </a:xfrm>
+          <a:prstGeom prst="rect">
+            <a:avLst/>
+          </a:prstGeom>
+          <a:noFill/>
+        </p:spPr>
+        <p:txBody>
+          <a:bodyPr wrap="square" anchor="t" lIns="38100" rIns="38100" tIns="12700" bIns="12700">
+            <a:spAutoFit/>
+          </a:bodyPr>
+          <a:lstStyle/>
+          <a:p>
+            <a:pPr algn="l">
+              <a:spcAft>
+                <a:spcPts val="200"/>
+              </a:spcAft>
+            </a:pPr>
+            <a:r>
+              <a:rPr sz="1150" b="1">
+                <a:solidFill>
+                  <a:srgbClr val="141412"/>
+                </a:solidFill>
+                <a:latin typeface="맑은 고딕"/>
+              </a:rPr>
+              <a:t>인플루언서 시딩이 도는 원리</a:t>
+            </a:r>
+          </a:p>
+        </p:txBody>
+      </p:sp>
+      <p:sp>
+        <p:nvSpPr>
+          <p:cNvPr id="34" name="Rounded Rectangle 33"/>
           <p:cNvSpPr/>
           <p:nvPr/>
         </p:nvSpPr>
         <p:spPr>
           <a:xfrm>
-            <a:off x="9893808" y="2240280"/>
-            <a:ext cx="1682496" cy="932688"/>
+            <a:off x="9052560" y="2450592"/>
+            <a:ext cx="2523744" cy="1060704"/>
           </a:xfrm>
           <a:prstGeom prst="roundRect">
             <a:avLst>
-              <a:gd name="adj" fmla="val 10000"/>
+              <a:gd name="adj" fmla="val 8000"/>
             </a:avLst>
           </a:prstGeom>
           <a:solidFill>
@@ -4604,14 +4643,14 @@
       </p:sp>
       <p:sp>
         <p:nvSpPr>
-          <p:cNvPr id="34" name="TextBox 33"/>
+          <p:cNvPr id="35" name="TextBox 34"/>
           <p:cNvSpPr txBox="1"/>
           <p:nvPr/>
         </p:nvSpPr>
         <p:spPr>
           <a:xfrm>
-            <a:off x="9893808" y="2331720"/>
-            <a:ext cx="1682496" cy="822960"/>
+            <a:off x="9198864" y="2505456"/>
+            <a:ext cx="2249424" cy="292608"/>
           </a:xfrm>
           <a:prstGeom prst="rect">
             <a:avLst/>
@@ -4624,69 +4663,76 @@
           </a:bodyPr>
           <a:lstStyle/>
           <a:p>
-            <a:pPr algn="ctr">
-              <a:spcAft>
-                <a:spcPts val="200"/>
-              </a:spcAft>
-            </a:pPr>
-            <a:r>
-              <a:rPr sz="1150" b="1">
+            <a:pPr algn="l">
+              <a:spcAft>
+                <a:spcPts val="200"/>
+              </a:spcAft>
+            </a:pPr>
+            <a:r>
+              <a:rPr sz="1050" b="1">
                 <a:solidFill>
                   <a:srgbClr val="FFFFFF"/>
                 </a:solidFill>
                 <a:latin typeface="맑은 고딕"/>
               </a:rPr>
-              <a:t>첫 바퀴 (7월)</a:t>
-            </a:r>
-          </a:p>
-          <a:p>
-            <a:pPr algn="ctr">
-              <a:spcAft>
-                <a:spcPts val="200"/>
-              </a:spcAft>
-            </a:pPr>
-            <a:r>
-              <a:rPr sz="1000" b="0">
+              <a:t>① 정지마찰 돌파  ·  7~8월</a:t>
+            </a:r>
+          </a:p>
+        </p:txBody>
+      </p:sp>
+      <p:sp>
+        <p:nvSpPr>
+          <p:cNvPr id="36" name="TextBox 35"/>
+          <p:cNvSpPr txBox="1"/>
+          <p:nvPr/>
+        </p:nvSpPr>
+        <p:spPr>
+          <a:xfrm>
+            <a:off x="9198864" y="2798064"/>
+            <a:ext cx="2249424" cy="676656"/>
+          </a:xfrm>
+          <a:prstGeom prst="rect">
+            <a:avLst/>
+          </a:prstGeom>
+          <a:noFill/>
+        </p:spPr>
+        <p:txBody>
+          <a:bodyPr wrap="square" anchor="t" lIns="38100" rIns="38100" tIns="12700" bIns="12700">
+            <a:spAutoFit/>
+          </a:bodyPr>
+          <a:lstStyle/>
+          <a:p>
+            <a:pPr algn="l">
+              <a:spcAft>
+                <a:spcPts val="200"/>
+              </a:spcAft>
+            </a:pPr>
+            <a:r>
+              <a:rPr sz="900" b="0">
                 <a:solidFill>
                   <a:srgbClr val="E6E6DD"/>
                 </a:solidFill>
                 <a:latin typeface="맑은 고딕"/>
               </a:rPr>
-              <a:t>가장 무겁게,</a:t>
-            </a:r>
-          </a:p>
-          <a:p>
-            <a:pPr algn="ctr">
-              <a:spcAft>
-                <a:spcPts val="200"/>
-              </a:spcAft>
-            </a:pPr>
-            <a:r>
-              <a:rPr sz="1000" b="0">
-                <a:solidFill>
-                  <a:srgbClr val="E6E6DD"/>
-                </a:solidFill>
-                <a:latin typeface="맑은 고딕"/>
-              </a:rPr>
-              <a:t>강하게 민다</a:t>
-            </a:r>
-          </a:p>
-        </p:txBody>
-      </p:sp>
-      <p:sp>
-        <p:nvSpPr>
-          <p:cNvPr id="35" name="Rounded Rectangle 34"/>
+              <a:t>다수 마이크로·나노를 동시에 시딩 → 후기·UGC가 임계량을 넘어 ‘많이 보이는 제품’으로 점화</a:t>
+            </a:r>
+          </a:p>
+        </p:txBody>
+      </p:sp>
+      <p:sp>
+        <p:nvSpPr>
+          <p:cNvPr id="37" name="Rounded Rectangle 36"/>
           <p:cNvSpPr/>
           <p:nvPr/>
         </p:nvSpPr>
         <p:spPr>
           <a:xfrm>
-            <a:off x="9893808" y="3310128"/>
-            <a:ext cx="1682496" cy="932688"/>
+            <a:off x="9052560" y="3621024"/>
+            <a:ext cx="2523744" cy="1060704"/>
           </a:xfrm>
           <a:prstGeom prst="roundRect">
             <a:avLst>
-              <a:gd name="adj" fmla="val 10000"/>
+              <a:gd name="adj" fmla="val 8000"/>
             </a:avLst>
           </a:prstGeom>
           <a:solidFill>
@@ -4723,14 +4769,14 @@
       </p:sp>
       <p:sp>
         <p:nvSpPr>
-          <p:cNvPr id="36" name="TextBox 35"/>
+          <p:cNvPr id="38" name="TextBox 37"/>
           <p:cNvSpPr txBox="1"/>
           <p:nvPr/>
         </p:nvSpPr>
         <p:spPr>
           <a:xfrm>
-            <a:off x="9893808" y="3401568"/>
-            <a:ext cx="1682496" cy="822960"/>
+            <a:off x="9198864" y="3675887"/>
+            <a:ext cx="2249424" cy="292608"/>
           </a:xfrm>
           <a:prstGeom prst="rect">
             <a:avLst/>
@@ -4743,69 +4789,76 @@
           </a:bodyPr>
           <a:lstStyle/>
           <a:p>
-            <a:pPr algn="ctr">
-              <a:spcAft>
-                <a:spcPts val="200"/>
-              </a:spcAft>
-            </a:pPr>
-            <a:r>
-              <a:rPr sz="1150" b="1">
+            <a:pPr algn="l">
+              <a:spcAft>
+                <a:spcPts val="200"/>
+              </a:spcAft>
+            </a:pPr>
+            <a:r>
+              <a:rPr sz="1050" b="1">
                 <a:solidFill>
                   <a:srgbClr val="141412"/>
                 </a:solidFill>
                 <a:latin typeface="맑은 고딕"/>
               </a:rPr>
-              <a:t>가속</a:t>
-            </a:r>
-          </a:p>
-          <a:p>
-            <a:pPr algn="ctr">
-              <a:spcAft>
-                <a:spcPts val="200"/>
-              </a:spcAft>
-            </a:pPr>
-            <a:r>
-              <a:rPr sz="1000" b="0">
+              <a:t>② 관성·복리  ·  9~11월</a:t>
+            </a:r>
+          </a:p>
+        </p:txBody>
+      </p:sp>
+      <p:sp>
+        <p:nvSpPr>
+          <p:cNvPr id="39" name="TextBox 38"/>
+          <p:cNvSpPr txBox="1"/>
+          <p:nvPr/>
+        </p:nvSpPr>
+        <p:spPr>
+          <a:xfrm>
+            <a:off x="9198864" y="3968496"/>
+            <a:ext cx="2249424" cy="676656"/>
+          </a:xfrm>
+          <a:prstGeom prst="rect">
+            <a:avLst/>
+          </a:prstGeom>
+          <a:noFill/>
+        </p:spPr>
+        <p:txBody>
+          <a:bodyPr wrap="square" anchor="t" lIns="38100" rIns="38100" tIns="12700" bIns="12700">
+            <a:spAutoFit/>
+          </a:bodyPr>
+          <a:lstStyle/>
+          <a:p>
+            <a:pPr algn="l">
+              <a:spcAft>
+                <a:spcPts val="200"/>
+              </a:spcAft>
+            </a:pPr>
+            <a:r>
+              <a:rPr sz="900" b="0">
                 <a:solidFill>
                   <a:srgbClr val="373734"/>
                 </a:solidFill>
                 <a:latin typeface="맑은 고딕"/>
               </a:rPr>
-              <a:t>관성이 붙어</a:t>
-            </a:r>
-          </a:p>
-          <a:p>
-            <a:pPr algn="ctr">
-              <a:spcAft>
-                <a:spcPts val="200"/>
-              </a:spcAft>
-            </a:pPr>
-            <a:r>
-              <a:rPr sz="1000" b="0">
-                <a:solidFill>
-                  <a:srgbClr val="373734"/>
-                </a:solidFill>
-                <a:latin typeface="맑은 고딕"/>
-              </a:rPr>
-              <a:t>점점 빨리</a:t>
-            </a:r>
-          </a:p>
-        </p:txBody>
-      </p:sp>
-      <p:sp>
-        <p:nvSpPr>
-          <p:cNvPr id="37" name="Rounded Rectangle 36"/>
+              <a:t>후기→신뢰→전환→랭킹→재노출 고리가 스스로 돌고, 위닝 콘텐츠를 PA·인앱에 재투입</a:t>
+            </a:r>
+          </a:p>
+        </p:txBody>
+      </p:sp>
+      <p:sp>
+        <p:nvSpPr>
+          <p:cNvPr id="40" name="Rounded Rectangle 39"/>
           <p:cNvSpPr/>
           <p:nvPr/>
         </p:nvSpPr>
         <p:spPr>
           <a:xfrm>
-            <a:off x="9893808" y="4379976"/>
-            <a:ext cx="1682496" cy="960120"/>
+            <a:off x="9052560" y="4791456"/>
+            <a:ext cx="2523744" cy="1005840"/>
           </a:xfrm>
           <a:prstGeom prst="roundRect">
             <a:avLst>
-              <a:gd name="adj" fmla="val 10000"/>
+              <a:gd name="adj" fmla="val 8000"/>
             </a:avLst>
           </a:prstGeom>
           <a:solidFill>
@@ -4840,14 +4893,14 @@
       </p:sp>
       <p:sp>
         <p:nvSpPr>
-          <p:cNvPr id="38" name="TextBox 37"/>
+          <p:cNvPr id="41" name="TextBox 40"/>
           <p:cNvSpPr txBox="1"/>
           <p:nvPr/>
         </p:nvSpPr>
         <p:spPr>
           <a:xfrm>
-            <a:off x="9893808" y="4480560"/>
-            <a:ext cx="1682496" cy="841248"/>
+            <a:off x="9198864" y="4846320"/>
+            <a:ext cx="2249424" cy="292608"/>
           </a:xfrm>
           <a:prstGeom prst="rect">
             <a:avLst/>
@@ -4860,58 +4913,65 @@
           </a:bodyPr>
           <a:lstStyle/>
           <a:p>
-            <a:pPr algn="ctr">
-              <a:spcAft>
-                <a:spcPts val="200"/>
-              </a:spcAft>
-            </a:pPr>
-            <a:r>
-              <a:rPr sz="1150" b="1">
+            <a:pPr algn="l">
+              <a:spcAft>
+                <a:spcPts val="200"/>
+              </a:spcAft>
+            </a:pPr>
+            <a:r>
+              <a:rPr sz="1050" b="1">
                 <a:solidFill>
                   <a:srgbClr val="FFFFFF"/>
                 </a:solidFill>
                 <a:latin typeface="맑은 고딕"/>
               </a:rPr>
-              <a:t>정상</a:t>
-            </a:r>
-          </a:p>
-          <a:p>
-            <a:pPr algn="ctr">
-              <a:spcAft>
-                <a:spcPts val="200"/>
-              </a:spcAft>
-            </a:pPr>
-            <a:r>
-              <a:rPr sz="1000" b="0">
+              <a:t>③ 자가가속  ·  12월~</a:t>
+            </a:r>
+          </a:p>
+        </p:txBody>
+      </p:sp>
+      <p:sp>
+        <p:nvSpPr>
+          <p:cNvPr id="42" name="TextBox 41"/>
+          <p:cNvSpPr txBox="1"/>
+          <p:nvPr/>
+        </p:nvSpPr>
+        <p:spPr>
+          <a:xfrm>
+            <a:off x="9198864" y="5138928"/>
+            <a:ext cx="2249424" cy="621792"/>
+          </a:xfrm>
+          <a:prstGeom prst="rect">
+            <a:avLst/>
+          </a:prstGeom>
+          <a:noFill/>
+        </p:spPr>
+        <p:txBody>
+          <a:bodyPr wrap="square" anchor="t" lIns="38100" rIns="38100" tIns="12700" bIns="12700">
+            <a:spAutoFit/>
+          </a:bodyPr>
+          <a:lstStyle/>
+          <a:p>
+            <a:pPr algn="l">
+              <a:spcAft>
+                <a:spcPts val="200"/>
+              </a:spcAft>
+            </a:pPr>
+            <a:r>
+              <a:rPr sz="900" b="0">
                 <a:solidFill>
                   <a:srgbClr val="E6E6DD"/>
                 </a:solidFill>
                 <a:latin typeface="맑은 고딕"/>
               </a:rPr>
-              <a:t>올영세일</a:t>
-            </a:r>
-          </a:p>
-          <a:p>
-            <a:pPr algn="ctr">
-              <a:spcAft>
-                <a:spcPts val="200"/>
-              </a:spcAft>
-            </a:pPr>
-            <a:r>
-              <a:rPr sz="1000" b="0">
-                <a:solidFill>
-                  <a:srgbClr val="E6E6DD"/>
-                </a:solidFill>
-                <a:latin typeface="맑은 고딕"/>
-              </a:rPr>
-              <a:t>랭킹 1위</a:t>
-            </a:r>
-          </a:p>
-        </p:txBody>
-      </p:sp>
-      <p:sp>
-        <p:nvSpPr>
-          <p:cNvPr id="39" name="Rounded Rectangle 38"/>
+              <a:t>후기·CRM·재구매가 다음 시딩의 연료 → 적은 힘으로 더 빠르게, 올영세일 1위가 노출·신뢰를 다시 키움</a:t>
+            </a:r>
+          </a:p>
+        </p:txBody>
+      </p:sp>
+      <p:sp>
+        <p:nvSpPr>
+          <p:cNvPr id="43" name="Rounded Rectangle 42"/>
           <p:cNvSpPr/>
           <p:nvPr/>
         </p:nvSpPr>
@@ -4957,7 +5017,7 @@
       </p:sp>
       <p:sp>
         <p:nvSpPr>
-          <p:cNvPr id="40" name="TextBox 39"/>
+          <p:cNvPr id="44" name="TextBox 43"/>
           <p:cNvSpPr txBox="1"/>
           <p:nvPr/>
         </p:nvSpPr>
